--- a/vault/courses/production-agents-claude-agent-sdk-mcp-connector/ch01-slides.pptx
+++ b/vault/courses/production-agents-claude-agent-sdk-mcp-connector/ch01-slides.pptx
@@ -3282,7 +3282,7 @@
         <p:spPr>
           <a:xfrm>
             <a:off x="731520" y="1600200"/>
-            <a:ext cx="10698480" cy="960120"/>
+            <a:ext cx="10698480" cy="914400"/>
           </a:xfrm>
           <a:prstGeom prst="rect">
             <a:avLst/>
@@ -3302,7 +3302,7 @@
                   <a:srgbClr val="FFFFFF"/>
                 </a:solidFill>
               </a:rPr>
-              <a:t>  The npm package changed from @anthropic-ai/claude-code-sdk to @anthropic-ai/claude-agent-sdk; the PyPI package changed from claude-code to c</a:t>
+              <a:t>  Package rename: npm moved to @anthropic-ai/claude-agent-sdk and Python moved to claude-agent-sdk.</a:t>
             </a:r>
           </a:p>
         </p:txBody>
@@ -3315,8 +3315,8 @@
         </p:nvSpPr>
         <p:spPr>
           <a:xfrm>
-            <a:off x="731520" y="2651760"/>
-            <a:ext cx="10698480" cy="960120"/>
+            <a:off x="731520" y="2624328"/>
+            <a:ext cx="10698480" cy="914400"/>
           </a:xfrm>
           <a:prstGeom prst="rect">
             <a:avLst/>
@@ -3336,7 +3336,7 @@
                   <a:srgbClr val="FFFFFF"/>
                 </a:solidFill>
               </a:rPr>
-              <a:t>  Opus 4.7 (claude-opus-4-7) requires Agent SDK v0.2.111 or later; older SDK versions throw a thinking.type.enabled API error when targeting O</a:t>
+              <a:t>  Opus 4.7 requires Agent SDK v0.2.111+, or older clients fail with thinking.type.enabled errors.</a:t>
             </a:r>
           </a:p>
         </p:txBody>
@@ -3349,8 +3349,8 @@
         </p:nvSpPr>
         <p:spPr>
           <a:xfrm>
-            <a:off x="731520" y="3703320"/>
-            <a:ext cx="10698480" cy="960120"/>
+            <a:off x="731520" y="3648456"/>
+            <a:ext cx="10698480" cy="914400"/>
           </a:xfrm>
           <a:prstGeom prst="rect">
             <a:avLst/>
@@ -3370,7 +3370,7 @@
                   <a:srgbClr val="FFFFFF"/>
                 </a:solidFill>
               </a:rPr>
-              <a:t>  The TypeScript SDK bundles a native Claude Code binary for your platform as an optional dependency — you no longer need a separate Claude Co</a:t>
+              <a:t>  TypeScript SDK bundles a native Claude Code binary, so a separate local install is not required.</a:t>
             </a:r>
           </a:p>
         </p:txBody>
@@ -3383,8 +3383,8 @@
         </p:nvSpPr>
         <p:spPr>
           <a:xfrm>
-            <a:off x="731520" y="4754880"/>
-            <a:ext cx="10698480" cy="960120"/>
+            <a:off x="731520" y="4672584"/>
+            <a:ext cx="10698480" cy="914400"/>
           </a:xfrm>
           <a:prstGeom prst="rect">
             <a:avLst/>
@@ -3404,7 +3404,7 @@
                   <a:srgbClr val="FFFFFF"/>
                 </a:solidFill>
               </a:rPr>
-              <a:t>  Authentication on Amazon Bedrock, Google Vertex AI, and Microsoft Azure Foundry is controlled entirely by environment variables (CLAUDE_CODE</a:t>
+              <a:t>  Provider routing uses env flags (Bedrock, Vertex, Foundry) instead of constructor arguments.</a:t>
             </a:r>
           </a:p>
         </p:txBody>
@@ -3555,7 +3555,7 @@
         <p:spPr>
           <a:xfrm>
             <a:off x="731520" y="1600200"/>
-            <a:ext cx="10698480" cy="960120"/>
+            <a:ext cx="10698480" cy="914400"/>
           </a:xfrm>
           <a:prstGeom prst="rect">
             <a:avLst/>
@@ -3575,7 +3575,7 @@
                   <a:srgbClr val="FFFFFF"/>
                 </a:solidFill>
               </a:rPr>
-              <a:t>  Most developers saw the April 2026 announcement and ran npm install @anthropic-ai/claude-agent-sdk. Done, right? Not quite.</a:t>
+              <a:t>  The rename separates Claude Code the app from the Agent SDK as a platform library for custom agents.</a:t>
             </a:r>
           </a:p>
         </p:txBody>
@@ -3588,8 +3588,8 @@
         </p:nvSpPr>
         <p:spPr>
           <a:xfrm>
-            <a:off x="731520" y="2651760"/>
-            <a:ext cx="10698480" cy="960120"/>
+            <a:off x="731520" y="2624328"/>
+            <a:ext cx="10698480" cy="914400"/>
           </a:xfrm>
           <a:prstGeom prst="rect">
             <a:avLst/>
@@ -3609,7 +3609,7 @@
                   <a:srgbClr val="FFFFFF"/>
                 </a:solidFill>
               </a:rPr>
-              <a:t>  The rename matters strategically because it de-couples the SDK from Claude Code the developer product. Claude Code is a terminal app; the Cl</a:t>
+              <a:t>  Branding rules now prohibit shipping partner products as "Claude Code," so product naming must change too.</a:t>
             </a:r>
           </a:p>
         </p:txBody>
@@ -3622,8 +3622,8 @@
         </p:nvSpPr>
         <p:spPr>
           <a:xfrm>
-            <a:off x="731520" y="3703320"/>
-            <a:ext cx="10698480" cy="960120"/>
+            <a:off x="731520" y="3648456"/>
+            <a:ext cx="10698480" cy="914400"/>
           </a:xfrm>
           <a:prstGeom prst="rect">
             <a:avLst/>
@@ -3643,7 +3643,7 @@
                   <a:srgbClr val="FFFFFF"/>
                 </a:solidFill>
               </a:rPr>
-              <a:t>  There's also a real technical signal in the version requirement. Requiring v0.2.111 for Opus 4.7 means Anthropic is now coupling model relea</a:t>
+              <a:t>  SDK and model versions are now coupled more tightly, so teams need explicit SDK upgrade discipline.</a:t>
             </a:r>
           </a:p>
         </p:txBody>
@@ -3651,6 +3651,40 @@
       <p:sp>
         <p:nvSpPr>
           <p:cNvPr id="7" name="TextBox 6"/>
+          <p:cNvSpPr txBox="1"/>
+          <p:nvPr/>
+        </p:nvSpPr>
+        <p:spPr>
+          <a:xfrm>
+            <a:off x="731520" y="4672584"/>
+            <a:ext cx="10698480" cy="914400"/>
+          </a:xfrm>
+          <a:prstGeom prst="rect">
+            <a:avLst/>
+          </a:prstGeom>
+          <a:noFill/>
+        </p:spPr>
+        <p:txBody>
+          <a:bodyPr wrap="square">
+            <a:spAutoFit/>
+          </a:bodyPr>
+          <a:lstStyle/>
+          <a:p>
+            <a:pPr algn="l"/>
+            <a:r>
+              <a:rPr sz="1700" b="0">
+                <a:solidFill>
+                  <a:srgbClr val="FFFFFF"/>
+                </a:solidFill>
+              </a:rPr>
+              <a:t>  Session resume and built-in tool controls signal a production platform direction, not a demo-only SDK.</a:t>
+            </a:r>
+          </a:p>
+        </p:txBody>
+      </p:sp>
+      <p:sp>
+        <p:nvSpPr>
+          <p:cNvPr id="8" name="TextBox 7"/>
           <p:cNvSpPr txBox="1"/>
           <p:nvPr/>
         </p:nvSpPr>
@@ -3737,7 +3771,7 @@
                   <a:srgbClr val="FFFFFF"/>
                 </a:solidFill>
               </a:rPr>
-              <a:t>Installing the renamed SDK</a:t>
+              <a:t>Install migration examples (visible)</a:t>
             </a:r>
           </a:p>
         </p:txBody>
@@ -3794,7 +3828,7 @@
         <p:spPr>
           <a:xfrm>
             <a:off x="731520" y="1600200"/>
-            <a:ext cx="10698480" cy="960120"/>
+            <a:ext cx="10698480" cy="914400"/>
           </a:xfrm>
           <a:prstGeom prst="rect">
             <a:avLst/>
@@ -3814,7 +3848,7 @@
                   <a:srgbClr val="FFFFFF"/>
                 </a:solidFill>
               </a:rPr>
-              <a:t>  TypeScript</a:t>
+              <a:t>  TypeScript install path: npm uninstall @anthropic-ai/claude-code-sdk, then npm install @anthropic-ai/claude-agent-sdk.</a:t>
             </a:r>
           </a:p>
         </p:txBody>
@@ -3827,8 +3861,8 @@
         </p:nvSpPr>
         <p:spPr>
           <a:xfrm>
-            <a:off x="731520" y="2651760"/>
-            <a:ext cx="10698480" cy="960120"/>
+            <a:off x="731520" y="2624328"/>
+            <a:ext cx="10698480" cy="914400"/>
           </a:xfrm>
           <a:prstGeom prst="rect">
             <a:avLst/>
@@ -3848,7 +3882,7 @@
                   <a:srgbClr val="FFFFFF"/>
                 </a:solidFill>
               </a:rPr>
-              <a:t>  # Remove the old package</a:t>
+              <a:t>  Python install path: pip uninstall claude-code, then pip install claude-agent-sdk.</a:t>
             </a:r>
           </a:p>
         </p:txBody>
@@ -3861,8 +3895,8 @@
         </p:nvSpPr>
         <p:spPr>
           <a:xfrm>
-            <a:off x="731520" y="3703320"/>
-            <a:ext cx="10698480" cy="960120"/>
+            <a:off x="731520" y="3648456"/>
+            <a:ext cx="10698480" cy="914400"/>
           </a:xfrm>
           <a:prstGeom prst="rect">
             <a:avLst/>
@@ -3882,7 +3916,7 @@
                   <a:srgbClr val="FFFFFF"/>
                 </a:solidFill>
               </a:rPr>
-              <a:t>  npm uninstall @anthropic-ai/claude-code-sdk</a:t>
+              <a:t>  Verify installation versions in package.json or pip show before running production workloads.</a:t>
             </a:r>
           </a:p>
         </p:txBody>
@@ -3895,8 +3929,8 @@
         </p:nvSpPr>
         <p:spPr>
           <a:xfrm>
-            <a:off x="731520" y="4754880"/>
-            <a:ext cx="10698480" cy="960120"/>
+            <a:off x="731520" y="4672584"/>
+            <a:ext cx="10698480" cy="914400"/>
           </a:xfrm>
           <a:prstGeom prst="rect">
             <a:avLst/>
@@ -3916,7 +3950,7 @@
                   <a:srgbClr val="FFFFFF"/>
                 </a:solidFill>
               </a:rPr>
-              <a:t>  # Install the renamed package</a:t>
+              <a:t>  Keep rollback notes for pinned versions in case downstream services still reference old package names.</a:t>
             </a:r>
           </a:p>
         </p:txBody>
@@ -4010,7 +4044,7 @@
                   <a:srgbClr val="FFFFFF"/>
                 </a:solidFill>
               </a:rPr>
-              <a:t>Updating your imports</a:t>
+              <a:t>Import + query migration examples</a:t>
             </a:r>
           </a:p>
         </p:txBody>
@@ -4067,7 +4101,7 @@
         <p:spPr>
           <a:xfrm>
             <a:off x="731520" y="1600200"/>
-            <a:ext cx="10698480" cy="960120"/>
+            <a:ext cx="10698480" cy="914400"/>
           </a:xfrm>
           <a:prstGeom prst="rect">
             <a:avLst/>
@@ -4087,7 +4121,7 @@
                   <a:srgbClr val="FFFFFF"/>
                 </a:solidFill>
               </a:rPr>
-              <a:t>  Every import in your existing code needs to change. This is a search-and-replace operation, not a logic change.</a:t>
+              <a:t>  Update TypeScript imports from @anthropic-ai/claude-code-sdk to @anthropic-ai/claude-agent-sdk.</a:t>
             </a:r>
           </a:p>
         </p:txBody>
@@ -4100,8 +4134,8 @@
         </p:nvSpPr>
         <p:spPr>
           <a:xfrm>
-            <a:off x="731520" y="2651760"/>
-            <a:ext cx="10698480" cy="960120"/>
+            <a:off x="731520" y="2624328"/>
+            <a:ext cx="10698480" cy="914400"/>
           </a:xfrm>
           <a:prstGeom prst="rect">
             <a:avLst/>
@@ -4121,7 +4155,7 @@
                   <a:srgbClr val="FFFFFF"/>
                 </a:solidFill>
               </a:rPr>
-              <a:t>  TypeScript — before</a:t>
+              <a:t>  Update Python imports from claude_code_sdk to claude_agent_sdk and rename options to ClaudeAgentOptions.</a:t>
             </a:r>
           </a:p>
         </p:txBody>
@@ -4134,8 +4168,8 @@
         </p:nvSpPr>
         <p:spPr>
           <a:xfrm>
-            <a:off x="731520" y="3703320"/>
-            <a:ext cx="10698480" cy="960120"/>
+            <a:off x="731520" y="3648456"/>
+            <a:ext cx="10698480" cy="914400"/>
           </a:xfrm>
           <a:prstGeom prst="rect">
             <a:avLst/>
@@ -4155,7 +4189,7 @@
                   <a:srgbClr val="FFFFFF"/>
                 </a:solidFill>
               </a:rPr>
-              <a:t>  import { query } from "@anthropic-ai/claude-code-sdk";</a:t>
+              <a:t>  Run a minimal query() call with safe tools (for example Bash + Glob) to validate migration end to end.</a:t>
             </a:r>
           </a:p>
         </p:txBody>
@@ -4168,8 +4202,8 @@
         </p:nvSpPr>
         <p:spPr>
           <a:xfrm>
-            <a:off x="731520" y="4754880"/>
-            <a:ext cx="10698480" cy="960120"/>
+            <a:off x="731520" y="4672584"/>
+            <a:ext cx="10698480" cy="914400"/>
           </a:xfrm>
           <a:prstGeom prst="rect">
             <a:avLst/>
@@ -4189,7 +4223,7 @@
                   <a:srgbClr val="FFFFFF"/>
                 </a:solidFill>
               </a:rPr>
-              <a:t>  import type { ClaudeCodeOptions } from "@anthropic-ai/claude-code-sdk";</a:t>
+              <a:t>  Confirm the final ResultMessage arrives and capture usage/session metadata for observability.</a:t>
             </a:r>
           </a:p>
         </p:txBody>
@@ -4283,7 +4317,7 @@
                   <a:srgbClr val="FFFFFF"/>
                 </a:solidFill>
               </a:rPr>
-              <a:t>The `query()` API in 2 minutes</a:t>
+              <a:t>Session resume example (production)</a:t>
             </a:r>
           </a:p>
         </p:txBody>
@@ -4340,7 +4374,7 @@
         <p:spPr>
           <a:xfrm>
             <a:off x="731520" y="1600200"/>
-            <a:ext cx="10698480" cy="960120"/>
+            <a:ext cx="10698480" cy="914400"/>
           </a:xfrm>
           <a:prstGeom prst="rect">
             <a:avLst/>
@@ -4360,7 +4394,7 @@
                   <a:srgbClr val="FFFFFF"/>
                 </a:solidFill>
               </a:rPr>
-              <a:t>  The core API hasn't changed between SDK versions. query() is an async generator that yields message objects as the agent works through a tas</a:t>
+              <a:t>  Capture session_id from the initial SystemMessage subtype init and persist it with run metadata.</a:t>
             </a:r>
           </a:p>
         </p:txBody>
@@ -4373,8 +4407,8 @@
         </p:nvSpPr>
         <p:spPr>
           <a:xfrm>
-            <a:off x="731520" y="2651760"/>
-            <a:ext cx="10698480" cy="960120"/>
+            <a:off x="731520" y="2624328"/>
+            <a:ext cx="10698480" cy="914400"/>
           </a:xfrm>
           <a:prstGeom prst="rect">
             <a:avLst/>
@@ -4394,7 +4428,7 @@
                   <a:srgbClr val="FFFFFF"/>
                 </a:solidFill>
               </a:rPr>
-              <a:t>  from claude_agent_sdk import query, ClaudeAgentOptions</a:t>
+              <a:t>  Use resume=session_id on the next query() call so the agent continues context without re-reading files.</a:t>
             </a:r>
           </a:p>
         </p:txBody>
@@ -4407,8 +4441,8 @@
         </p:nvSpPr>
         <p:spPr>
           <a:xfrm>
-            <a:off x="731520" y="3703320"/>
-            <a:ext cx="10698480" cy="960120"/>
+            <a:off x="731520" y="3648456"/>
+            <a:ext cx="10698480" cy="914400"/>
           </a:xfrm>
           <a:prstGeom prst="rect">
             <a:avLst/>
@@ -4428,7 +4462,7 @@
                   <a:srgbClr val="FFFFFF"/>
                 </a:solidFill>
               </a:rPr>
-              <a:t>  async def main():</a:t>
+              <a:t>  Store session JSONL under a managed path with retention controls, not an unmanaged developer home directory.</a:t>
             </a:r>
           </a:p>
         </p:txBody>
@@ -4441,8 +4475,8 @@
         </p:nvSpPr>
         <p:spPr>
           <a:xfrm>
-            <a:off x="731520" y="4754880"/>
-            <a:ext cx="10698480" cy="960120"/>
+            <a:off x="731520" y="4672584"/>
+            <a:ext cx="10698480" cy="914400"/>
           </a:xfrm>
           <a:prstGeom prst="rect">
             <a:avLst/>
@@ -4462,7 +4496,7 @@
                   <a:srgbClr val="FFFFFF"/>
                 </a:solidFill>
               </a:rPr>
-              <a:t>  async for message in query(</a:t>
+              <a:t>  Include session resume tests in CI to prevent regressions during SDK and model upgrades.</a:t>
             </a:r>
           </a:p>
         </p:txBody>
